--- a/sentinelai/SentinelAI_Execution_Plan.pptx
+++ b/sentinelai/SentinelAI_Execution_Plan.pptx
@@ -1140,7 +1140,7 @@
           <a:p>
             <a:r>
               <a:rPr lang="en-US" dirty="0"/>
-              <a:t>Two co-founders with complementary ownership: Saatwik on engineering (edge AI, dashboard), Nirisha on research and strategy (validation, business model, IP). Bracketed placeholders — degree/college and confirmed advisor names — must be filled before submission.</a:t>
+              <a:t>Two co-founders, both Integrated M.Tech CSE at VIT-AP University (batch 2024-29), with complementary ownership: Saatwik on engineering (edge AI, dashboard), Nirisha on research and strategy (validation, business model, IP). Advisor slots are outreach targets for Phase 1.</a:t>
             </a:r>
             <a:endParaRPr lang="en-US" dirty="0"/>
           </a:p>
@@ -2995,8 +2995,8 @@
         </p:nvSpPr>
         <p:spPr>
           <a:xfrm>
-            <a:off x="1371600" y="5349240"/>
-            <a:ext cx="9445752" cy="320040"/>
+            <a:off x="1371600" y="5303520"/>
+            <a:ext cx="9445752" cy="594360"/>
           </a:xfrm>
           <a:prstGeom prst="rect">
             <a:avLst/>
@@ -3014,13 +3014,28 @@
             <a:r>
               <a:rPr lang="en-US" sz="1300" dirty="0">
                 <a:solidFill>
+                  <a:srgbClr val="A8C6E8"/>
+                </a:solidFill>
+                <a:latin typeface="Calibri" pitchFamily="34" charset="0"/>
+                <a:ea typeface="Calibri" pitchFamily="34" charset="-122"/>
+                <a:cs typeface="Calibri" pitchFamily="34" charset="-120"/>
+              </a:rPr>
+              <a:t>Saatwik Sairaam Vasamsetti  •  Sai Nirisha Chowdary Pavuluri
+</a:t>
+            </a:r>
+            <a:pPr algn="ctr" indent="0" marL="0">
+              <a:buNone/>
+            </a:pPr>
+            <a:r>
+              <a:rPr lang="en-US" sz="1300" dirty="0">
+                <a:solidFill>
                   <a:srgbClr val="7E97B8"/>
                 </a:solidFill>
                 <a:latin typeface="Calibri" pitchFamily="34" charset="0"/>
                 <a:ea typeface="Calibri" pitchFamily="34" charset="-122"/>
                 <a:cs typeface="Calibri" pitchFamily="34" charset="-120"/>
               </a:rPr>
-              <a:t>Saatwik  •  Nirisha Chowdary          July 2026</a:t>
+              <a:t>VIT-AP University  ·  July 2026</a:t>
             </a:r>
             <a:endParaRPr lang="en-US" sz="1300" dirty="0"/>
           </a:p>
@@ -7294,8 +7309,8 @@
         </p:nvSpPr>
         <p:spPr>
           <a:xfrm>
-            <a:off x="1965960" y="2011680"/>
-            <a:ext cx="3840480" cy="411480"/>
+            <a:off x="1965960" y="2029968"/>
+            <a:ext cx="3886200" cy="411480"/>
           </a:xfrm>
           <a:prstGeom prst="rect">
             <a:avLst/>
@@ -7311,7 +7326,7 @@
               <a:buNone/>
             </a:pPr>
             <a:r>
-              <a:rPr lang="en-US" sz="2000" b="1" dirty="0">
+              <a:rPr lang="en-US" sz="1650" b="1" dirty="0">
                 <a:solidFill>
                   <a:srgbClr val="FFFFFF"/>
                 </a:solidFill>
@@ -7319,9 +7334,9 @@
                 <a:ea typeface="Calibri" pitchFamily="34" charset="-122"/>
                 <a:cs typeface="Calibri" pitchFamily="34" charset="-120"/>
               </a:rPr>
-              <a:t>Saatwik</a:t>
-            </a:r>
-            <a:endParaRPr lang="en-US" sz="2000" dirty="0"/>
+              <a:t>Saatwik Sairaam Vasamsetti</a:t>
+            </a:r>
+            <a:endParaRPr lang="en-US" sz="1650" dirty="0"/>
           </a:p>
         </p:txBody>
       </p:sp>
@@ -7401,7 +7416,7 @@
                 <a:ea typeface="Calibri" pitchFamily="34" charset="-122"/>
                 <a:cs typeface="Calibri" pitchFamily="34" charset="-120"/>
               </a:rPr>
-              <a:t>Full-stack developer — shipped PathAhead (career-guidance platform), an ML stock-prediction system, and multiple production web platforms</a:t>
+              <a:t>Integrated M.Tech, CSE (5-year) — VIT-AP University, Batch 2024–29</a:t>
             </a:r>
             <a:endParaRPr lang="en-US" sz="1100" dirty="0"/>
           </a:p>
@@ -7422,7 +7437,7 @@
                 <a:ea typeface="Calibri" pitchFamily="34" charset="-122"/>
                 <a:cs typeface="Calibri" pitchFamily="34" charset="-120"/>
               </a:rPr>
-              <a:t>Owns: edge AI models, sensor fusion, dashboard build</a:t>
+              <a:t>Full-stack developer — shipped PathAhead (career-guidance platform), an ML stock-prediction system, and multiple production web platforms</a:t>
             </a:r>
             <a:endParaRPr lang="en-US" sz="1100" dirty="0"/>
           </a:p>
@@ -7443,7 +7458,7 @@
                 <a:ea typeface="Calibri" pitchFamily="34" charset="-122"/>
                 <a:cs typeface="Calibri" pitchFamily="34" charset="-120"/>
               </a:rPr>
-              <a:t>[Add: degree, branch, college, year]</a:t>
+              <a:t>Owns: edge AI models, sensor fusion, dashboard build</a:t>
             </a:r>
             <a:endParaRPr lang="en-US" sz="1100" dirty="0"/>
           </a:p>
@@ -7529,7 +7544,7 @@
                 <a:ea typeface="Calibri" pitchFamily="34" charset="-122"/>
                 <a:cs typeface="Calibri" pitchFamily="34" charset="-120"/>
               </a:rPr>
-              <a:t>N</a:t>
+              <a:t>S</a:t>
             </a:r>
             <a:endParaRPr lang="en-US" sz="3000" dirty="0"/>
           </a:p>
@@ -7543,8 +7558,8 @@
         </p:nvSpPr>
         <p:spPr>
           <a:xfrm>
-            <a:off x="7589520" y="2011680"/>
-            <a:ext cx="3840480" cy="411480"/>
+            <a:off x="7589520" y="2029968"/>
+            <a:ext cx="3886200" cy="411480"/>
           </a:xfrm>
           <a:prstGeom prst="rect">
             <a:avLst/>
@@ -7560,7 +7575,7 @@
               <a:buNone/>
             </a:pPr>
             <a:r>
-              <a:rPr lang="en-US" sz="2000" b="1" dirty="0">
+              <a:rPr lang="en-US" sz="1650" b="1" dirty="0">
                 <a:solidFill>
                   <a:srgbClr val="FFFFFF"/>
                 </a:solidFill>
@@ -7568,9 +7583,9 @@
                 <a:ea typeface="Calibri" pitchFamily="34" charset="-122"/>
                 <a:cs typeface="Calibri" pitchFamily="34" charset="-120"/>
               </a:rPr>
-              <a:t>Nirisha Chowdary</a:t>
-            </a:r>
-            <a:endParaRPr lang="en-US" sz="2000" dirty="0"/>
+              <a:t>Sai Nirisha Chowdary Pavuluri</a:t>
+            </a:r>
+            <a:endParaRPr lang="en-US" sz="1650" dirty="0"/>
           </a:p>
         </p:txBody>
       </p:sp>
@@ -7650,7 +7665,7 @@
                 <a:ea typeface="Calibri" pitchFamily="34" charset="-122"/>
                 <a:cs typeface="Calibri" pitchFamily="34" charset="-120"/>
               </a:rPr>
-              <a:t>Concept originator — authored the SentinelAI vision, market analysis and IP strategy; built a GPT implementation from scratch in pure Python</a:t>
+              <a:t>Integrated M.Tech, CSE (5-year) — VIT-AP University, Batch 2024–29</a:t>
             </a:r>
             <a:endParaRPr lang="en-US" sz="1100" dirty="0"/>
           </a:p>
@@ -7671,7 +7686,7 @@
                 <a:ea typeface="Calibri" pitchFamily="34" charset="-122"/>
                 <a:cs typeface="Calibri" pitchFamily="34" charset="-120"/>
               </a:rPr>
-              <a:t>Owns: stakeholder validation, business model, partnerships</a:t>
+              <a:t>Concept originator — authored the SentinelAI vision, market analysis and IP strategy; built a GPT implementation from scratch in pure Python</a:t>
             </a:r>
             <a:endParaRPr lang="en-US" sz="1100" dirty="0"/>
           </a:p>
@@ -7692,7 +7707,7 @@
                 <a:ea typeface="Calibri" pitchFamily="34" charset="-122"/>
                 <a:cs typeface="Calibri" pitchFamily="34" charset="-120"/>
               </a:rPr>
-              <a:t>[Add: degree, branch, college, year]</a:t>
+              <a:t>Owns: stakeholder validation, business model, partnerships</a:t>
             </a:r>
             <a:endParaRPr lang="en-US" sz="1100" dirty="0"/>
           </a:p>
@@ -7792,7 +7807,7 @@
                 <a:ea typeface="Calibri" pitchFamily="34" charset="-122"/>
                 <a:cs typeface="Calibri" pitchFamily="34" charset="-120"/>
               </a:rPr>
-              <a:t>Phase 1 targets: one police-department mentor, one 108/EMRI operations contact, one municipal smart-city officer, one faculty advisor (embedded systems / AI). [Add names as confirmed]</a:t>
+              <a:t>Phase 1 targets: one police-department mentor, one 108/EMRI operations contact, one municipal smart-city officer, one faculty advisor (embedded systems / AI) at VIT-AP. Names added as they are confirmed.</a:t>
             </a:r>
             <a:endParaRPr lang="en-US" sz="1200" dirty="0"/>
           </a:p>
@@ -9632,8 +9647,8 @@
         </p:nvSpPr>
         <p:spPr>
           <a:xfrm>
-            <a:off x="1097280" y="5532120"/>
-            <a:ext cx="9994392" cy="320040"/>
+            <a:off x="1097280" y="5440680"/>
+            <a:ext cx="9994392" cy="594360"/>
           </a:xfrm>
           <a:prstGeom prst="rect">
             <a:avLst/>
@@ -9651,13 +9666,28 @@
             <a:r>
               <a:rPr lang="en-US" sz="1250" dirty="0">
                 <a:solidFill>
+                  <a:srgbClr val="A8C6E8"/>
+                </a:solidFill>
+                <a:latin typeface="Calibri" pitchFamily="34" charset="0"/>
+                <a:ea typeface="Calibri" pitchFamily="34" charset="-122"/>
+                <a:cs typeface="Calibri" pitchFamily="34" charset="-120"/>
+              </a:rPr>
+              <a:t>Team SentinelAI — VIT-AP University
+</a:t>
+            </a:r>
+            <a:pPr algn="ctr" indent="0" marL="0">
+              <a:buNone/>
+            </a:pPr>
+            <a:r>
+              <a:rPr lang="en-US" sz="1250" dirty="0">
+                <a:solidFill>
                   <a:srgbClr val="7E97B8"/>
                 </a:solidFill>
                 <a:latin typeface="Calibri" pitchFamily="34" charset="0"/>
                 <a:ea typeface="Calibri" pitchFamily="34" charset="-122"/>
                 <a:cs typeface="Calibri" pitchFamily="34" charset="-120"/>
               </a:rPr>
-              <a:t>Team SentinelAI  •  adithya001v@gmail.com</a:t>
+              <a:t>saathwik.13@gmail.com  •  nirishapavuluri@gmail.com</a:t>
             </a:r>
             <a:endParaRPr lang="en-US" sz="1250" dirty="0"/>
           </a:p>

--- a/sentinelai/SentinelAI_Execution_Plan.pptx
+++ b/sentinelai/SentinelAI_Execution_Plan.pptx
@@ -1052,7 +1052,7 @@
           <a:p>
             <a:r>
               <a:rPr lang="en-US" dirty="0"/>
-              <a:t>The simulation proves the system logic end-to-end in software before hardware spend: detection, multi-sensor verification, Safe Corridor mesh coordination, and dispatch. Record a 2-minute screen capture of the demo, upload it (YouTube unlisted / Drive), and paste the link into the placeholder box.</a:t>
+              <a:t>The simulation proves the system logic end-to-end in software before hardware spend: detection, multi-sensor verification, Safe Corridor mesh coordination, dispatch, and the predictive risk layer. A recorded ~70-second capture ships in the package (demo/SentinelAI_Demo.mp4) — upload it (YouTube unlisted / Drive) and paste the link into the placeholder box. The live version runs in any browser if you want to demo it interactively.</a:t>
             </a:r>
             <a:endParaRPr lang="en-US" dirty="0"/>
           </a:p>
@@ -6271,7 +6271,7 @@
                 <a:ea typeface="Calibri" pitchFamily="34" charset="-122"/>
                 <a:cs typeface="Calibri" pitchFamily="34" charset="-120"/>
               </a:rPr>
-              <a:t>We built a working software simulation of a SentinelAI deployment — a live city-block map of smart nodes that detects a simulated crash and SOS event, runs multi-sensor verification, activates the Safe Corridor, and dispatches alerts in real time.</a:t>
+              <a:t>We built a working software simulation of a SentinelAI deployment — a live 3D city block of smart nodes that detects a simulated crash and SOS event, runs multi-sensor verification, activates the Safe Corridor, and dispatches alerts in real time.</a:t>
             </a:r>
             <a:endParaRPr lang="en-US" sz="1450" dirty="0"/>
           </a:p>
@@ -6371,7 +6371,7 @@
                 <a:ea typeface="Calibri" pitchFamily="34" charset="-122"/>
                 <a:cs typeface="Calibri" pitchFamily="34" charset="-120"/>
               </a:rPr>
-              <a:t>9 smart poles on a city block, each streaming simulated sensor state</a:t>
+              <a:t>9 smart poles on a 3D city block, each streaming simulated sensor state</a:t>
             </a:r>
             <a:endParaRPr lang="en-US" sz="1050" dirty="0"/>
           </a:p>
@@ -6471,7 +6471,7 @@
                 <a:ea typeface="Calibri" pitchFamily="34" charset="-122"/>
                 <a:cs typeface="Calibri" pitchFamily="34" charset="-120"/>
               </a:rPr>
-              <a:t>crash + scream events trigger the on-node AI and validation gate</a:t>
+              <a:t>crash + distress events trigger the on-node AI, IR camera and validation gate</a:t>
             </a:r>
             <a:endParaRPr lang="en-US" sz="1050" dirty="0"/>
           </a:p>
@@ -6632,7 +6632,7 @@
                 <a:ea typeface="Calibri" pitchFamily="34" charset="-122"/>
                 <a:cs typeface="Calibri" pitchFamily="34" charset="-120"/>
               </a:rPr>
-              <a:t>Dispatch console</a:t>
+              <a:t>Predictive layer</a:t>
             </a:r>
             <a:endParaRPr lang="en-US" sz="1300" dirty="0"/>
           </a:p>
@@ -6671,7 +6671,7 @@
                 <a:ea typeface="Calibri" pitchFamily="34" charset="-122"/>
                 <a:cs typeface="Calibri" pitchFamily="34" charset="-120"/>
               </a:rPr>
-              <a:t>police / ambulance / family alerts with GPS fire automatically</a:t>
+              <a:t>30-day risk-forecast heatmap built from mesh history</a:t>
             </a:r>
             <a:endParaRPr lang="en-US" sz="1050" dirty="0"/>
           </a:p>
@@ -6901,7 +6901,7 @@
                 <a:ea typeface="Calibri" pitchFamily="34" charset="-122"/>
                 <a:cs typeface="Calibri" pitchFamily="34" charset="-120"/>
               </a:rPr>
-              <a:t>2-minute screen recording of the simulation:</a:t>
+              <a:t>≈1-minute screen recording of the auto demo:</a:t>
             </a:r>
             <a:endParaRPr lang="en-US" sz="1050" dirty="0"/>
           </a:p>
@@ -6918,7 +6918,7 @@
                 <a:ea typeface="Calibri" pitchFamily="34" charset="-122"/>
                 <a:cs typeface="Calibri" pitchFamily="34" charset="-120"/>
               </a:rPr>
-              <a:t>accident flow (0:00–1:00) and women's-safety SOS flow (1:00–2:00).</a:t>
+              <a:t>crash flow, women's-safety SOS flow, then the 30-day predictive-risk heatmap.</a:t>
             </a:r>
             <a:endParaRPr lang="en-US" sz="1050" dirty="0"/>
           </a:p>
@@ -6996,7 +6996,7 @@
                 <a:ea typeface="Calibri" pitchFamily="34" charset="-122"/>
                 <a:cs typeface="Calibri" pitchFamily="34" charset="-120"/>
               </a:rPr>
-              <a:t>Demo file: sentinelai/demo/index.html — runs in any browser, no install needed.</a:t>
+              <a:t>Demo: sentinelai/demo/index.html (live, any browser) · SentinelAI_Demo.mp4 (recorded) — no install needed.</a:t>
             </a:r>
             <a:endParaRPr lang="en-US" sz="1050" dirty="0"/>
           </a:p>

--- a/sentinelai/SentinelAI_Execution_Plan.pptx
+++ b/sentinelai/SentinelAI_Execution_Plan.pptx
@@ -7224,11 +7224,11 @@
         <p:spPr>
           <a:xfrm>
             <a:off x="548640" y="1600200"/>
-            <a:ext cx="5468112" cy="3291840"/>
+            <a:ext cx="5468112" cy="3429000"/>
           </a:xfrm>
           <a:prstGeom prst="roundRect">
             <a:avLst>
-              <a:gd name="adj" fmla="val 2222"/>
+              <a:gd name="adj" fmla="val 2133"/>
             </a:avLst>
           </a:prstGeom>
           <a:solidFill>
@@ -7387,8 +7387,8 @@
         </p:nvSpPr>
         <p:spPr>
           <a:xfrm>
-            <a:off x="914400" y="3063240"/>
-            <a:ext cx="4800600" cy="1737360"/>
+            <a:off x="914400" y="3017520"/>
+            <a:ext cx="4800600" cy="1371600"/>
           </a:xfrm>
           <a:prstGeom prst="rect">
             <a:avLst/>
@@ -7472,15 +7472,193 @@
         </p:nvSpPr>
         <p:spPr>
           <a:xfrm>
-            <a:off x="6172200" y="1600200"/>
-            <a:ext cx="5468112" cy="3291840"/>
+            <a:off x="914400" y="4462272"/>
+            <a:ext cx="2432304" cy="420624"/>
           </a:xfrm>
           <a:prstGeom prst="roundRect">
             <a:avLst>
-              <a:gd name="adj" fmla="val 2222"/>
+              <a:gd name="adj" fmla="val 15217"/>
             </a:avLst>
           </a:prstGeom>
           <a:solidFill>
+            <a:srgbClr val="1B3155"/>
+          </a:solidFill>
+          <a:ln/>
+        </p:spPr>
+      </p:sp>
+      <p:sp>
+        <p:nvSpPr>
+          <p:cNvPr id="15" name="Text 13"/>
+          <p:cNvSpPr/>
+          <p:nvPr/>
+        </p:nvSpPr>
+        <p:spPr>
+          <a:xfrm>
+            <a:off x="1024128" y="4462272"/>
+            <a:ext cx="2212848" cy="420624"/>
+          </a:xfrm>
+          <a:prstGeom prst="rect">
+            <a:avLst/>
+          </a:prstGeom>
+          <a:noFill/>
+          <a:ln/>
+        </p:spPr>
+        <p:txBody>
+          <a:bodyPr wrap="square" lIns="0" tIns="0" rIns="0" bIns="0" rtlCol="0" anchor="ctr"/>
+          <a:lstStyle/>
+          <a:p>
+            <a:pPr indent="0" marL="0">
+              <a:buNone/>
+            </a:pPr>
+            <a:r>
+              <a:rPr lang="en-US" sz="1000" b="1" u="sng" dirty="0">
+                <a:solidFill>
+                  <a:srgbClr val="FFB300"/>
+                </a:solidFill>
+                <a:latin typeface="Calibri" pitchFamily="34" charset="0"/>
+                <a:ea typeface="Calibri" pitchFamily="34" charset="-122"/>
+                <a:cs typeface="Calibri" pitchFamily="34" charset="-120"/>
+                <a:hlinkClick r:id="rId1" invalidUrl="" action="" tgtFrame="" tooltip="" history="1" highlightClick="0" endSnd="0">
+                  <a:extLst>
+                    <a:ext uri="{A12FA001-AC4F-418D-AE19-62706E023703}">
+                      <ahyp:hlinkClr xmlns:ahyp="http://schemas.microsoft.com/office/drawing/2018/hyperlinkcolor" val="tx"/>
+                    </a:ext>
+                  </a:extLst>
+                </a:hlinkClick>
+              </a:rPr>
+              <a:t>GitHub  </a:t>
+            </a:r>
+            <a:pPr indent="0" marL="0">
+              <a:buNone/>
+            </a:pPr>
+            <a:r>
+              <a:rPr lang="en-US" sz="1000" u="sng" dirty="0">
+                <a:solidFill>
+                  <a:srgbClr val="FFFFFF"/>
+                </a:solidFill>
+                <a:latin typeface="Calibri" pitchFamily="34" charset="0"/>
+                <a:ea typeface="Calibri" pitchFamily="34" charset="-122"/>
+                <a:cs typeface="Calibri" pitchFamily="34" charset="-120"/>
+                <a:hlinkClick r:id="rId2" invalidUrl="" action="" tgtFrame="" tooltip="" history="1" highlightClick="0" endSnd="0">
+                  <a:extLst>
+                    <a:ext uri="{A12FA001-AC4F-418D-AE19-62706E023703}">
+                      <ahyp:hlinkClr xmlns:ahyp="http://schemas.microsoft.com/office/drawing/2018/hyperlinkcolor" val="tx"/>
+                    </a:ext>
+                  </a:extLst>
+                </a:hlinkClick>
+              </a:rPr>
+              <a:t>/saatwik-1157</a:t>
+            </a:r>
+            <a:endParaRPr lang="en-US" sz="1000" dirty="0"/>
+          </a:p>
+        </p:txBody>
+      </p:sp>
+      <p:sp>
+        <p:nvSpPr>
+          <p:cNvPr id="16" name="Shape 14"/>
+          <p:cNvSpPr/>
+          <p:nvPr/>
+        </p:nvSpPr>
+        <p:spPr>
+          <a:xfrm>
+            <a:off x="3493008" y="4462272"/>
+            <a:ext cx="2432304" cy="420624"/>
+          </a:xfrm>
+          <a:prstGeom prst="roundRect">
+            <a:avLst>
+              <a:gd name="adj" fmla="val 15217"/>
+            </a:avLst>
+          </a:prstGeom>
+          <a:solidFill>
+            <a:srgbClr val="1B3155"/>
+          </a:solidFill>
+          <a:ln/>
+        </p:spPr>
+      </p:sp>
+      <p:sp>
+        <p:nvSpPr>
+          <p:cNvPr id="17" name="Text 15"/>
+          <p:cNvSpPr/>
+          <p:nvPr/>
+        </p:nvSpPr>
+        <p:spPr>
+          <a:xfrm>
+            <a:off x="3602736" y="4462272"/>
+            <a:ext cx="2212848" cy="420624"/>
+          </a:xfrm>
+          <a:prstGeom prst="rect">
+            <a:avLst/>
+          </a:prstGeom>
+          <a:noFill/>
+          <a:ln/>
+        </p:spPr>
+        <p:txBody>
+          <a:bodyPr wrap="square" lIns="0" tIns="0" rIns="0" bIns="0" rtlCol="0" anchor="ctr"/>
+          <a:lstStyle/>
+          <a:p>
+            <a:pPr indent="0" marL="0">
+              <a:buNone/>
+            </a:pPr>
+            <a:r>
+              <a:rPr lang="en-US" sz="1000" b="1" u="sng" dirty="0">
+                <a:solidFill>
+                  <a:srgbClr val="FFB300"/>
+                </a:solidFill>
+                <a:latin typeface="Calibri" pitchFamily="34" charset="0"/>
+                <a:ea typeface="Calibri" pitchFamily="34" charset="-122"/>
+                <a:cs typeface="Calibri" pitchFamily="34" charset="-120"/>
+                <a:hlinkClick r:id="rId3" invalidUrl="" action="" tgtFrame="" tooltip="" history="1" highlightClick="0" endSnd="0">
+                  <a:extLst>
+                    <a:ext uri="{A12FA001-AC4F-418D-AE19-62706E023703}">
+                      <ahyp:hlinkClr xmlns:ahyp="http://schemas.microsoft.com/office/drawing/2018/hyperlinkcolor" val="tx"/>
+                    </a:ext>
+                  </a:extLst>
+                </a:hlinkClick>
+              </a:rPr>
+              <a:t>LinkedIn  </a:t>
+            </a:r>
+            <a:pPr indent="0" marL="0">
+              <a:buNone/>
+            </a:pPr>
+            <a:r>
+              <a:rPr lang="en-US" sz="1000" u="sng" dirty="0">
+                <a:solidFill>
+                  <a:srgbClr val="FFFFFF"/>
+                </a:solidFill>
+                <a:latin typeface="Calibri" pitchFamily="34" charset="0"/>
+                <a:ea typeface="Calibri" pitchFamily="34" charset="-122"/>
+                <a:cs typeface="Calibri" pitchFamily="34" charset="-120"/>
+                <a:hlinkClick r:id="rId4" invalidUrl="" action="" tgtFrame="" tooltip="" history="1" highlightClick="0" endSnd="0">
+                  <a:extLst>
+                    <a:ext uri="{A12FA001-AC4F-418D-AE19-62706E023703}">
+                      <ahyp:hlinkClr xmlns:ahyp="http://schemas.microsoft.com/office/drawing/2018/hyperlinkcolor" val="tx"/>
+                    </a:ext>
+                  </a:extLst>
+                </a:hlinkClick>
+              </a:rPr>
+              <a:t>/saatwiksairaamvasamsetti</a:t>
+            </a:r>
+            <a:endParaRPr lang="en-US" sz="1000" dirty="0"/>
+          </a:p>
+        </p:txBody>
+      </p:sp>
+      <p:sp>
+        <p:nvSpPr>
+          <p:cNvPr id="18" name="Shape 16"/>
+          <p:cNvSpPr/>
+          <p:nvPr/>
+        </p:nvSpPr>
+        <p:spPr>
+          <a:xfrm>
+            <a:off x="6172200" y="1600200"/>
+            <a:ext cx="5468112" cy="3429000"/>
+          </a:xfrm>
+          <a:prstGeom prst="roundRect">
+            <a:avLst>
+              <a:gd name="adj" fmla="val 2133"/>
+            </a:avLst>
+          </a:prstGeom>
+          <a:solidFill>
             <a:srgbClr val="16294A"/>
           </a:solidFill>
           <a:ln/>
@@ -7488,7 +7666,7 @@
       </p:sp>
       <p:sp>
         <p:nvSpPr>
-          <p:cNvPr id="15" name="Shape 13"/>
+          <p:cNvPr id="19" name="Shape 17"/>
           <p:cNvSpPr/>
           <p:nvPr/>
         </p:nvSpPr>
@@ -7513,7 +7691,7 @@
       </p:sp>
       <p:sp>
         <p:nvSpPr>
-          <p:cNvPr id="16" name="Text 14"/>
+          <p:cNvPr id="20" name="Text 18"/>
           <p:cNvSpPr/>
           <p:nvPr/>
         </p:nvSpPr>
@@ -7552,7 +7730,7 @@
       </p:sp>
       <p:sp>
         <p:nvSpPr>
-          <p:cNvPr id="17" name="Text 15"/>
+          <p:cNvPr id="21" name="Text 19"/>
           <p:cNvSpPr/>
           <p:nvPr/>
         </p:nvSpPr>
@@ -7591,7 +7769,7 @@
       </p:sp>
       <p:sp>
         <p:nvSpPr>
-          <p:cNvPr id="18" name="Text 16"/>
+          <p:cNvPr id="22" name="Text 20"/>
           <p:cNvSpPr/>
           <p:nvPr/>
         </p:nvSpPr>
@@ -7630,14 +7808,14 @@
       </p:sp>
       <p:sp>
         <p:nvSpPr>
-          <p:cNvPr id="19" name="Text 17"/>
-          <p:cNvSpPr/>
-          <p:nvPr/>
-        </p:nvSpPr>
-        <p:spPr>
-          <a:xfrm>
-            <a:off x="6537960" y="3063240"/>
-            <a:ext cx="4800600" cy="1737360"/>
+          <p:cNvPr id="23" name="Text 21"/>
+          <p:cNvSpPr/>
+          <p:nvPr/>
+        </p:nvSpPr>
+        <p:spPr>
+          <a:xfrm>
+            <a:off x="6537960" y="3017520"/>
+            <a:ext cx="4800600" cy="1371600"/>
           </a:xfrm>
           <a:prstGeom prst="rect">
             <a:avLst/>
@@ -7715,18 +7893,18 @@
       </p:sp>
       <p:sp>
         <p:nvSpPr>
-          <p:cNvPr id="20" name="Shape 18"/>
-          <p:cNvSpPr/>
-          <p:nvPr/>
-        </p:nvSpPr>
-        <p:spPr>
-          <a:xfrm>
-            <a:off x="548640" y="5120640"/>
-            <a:ext cx="11091672" cy="1143000"/>
+          <p:cNvPr id="24" name="Shape 22"/>
+          <p:cNvSpPr/>
+          <p:nvPr/>
+        </p:nvSpPr>
+        <p:spPr>
+          <a:xfrm>
+            <a:off x="6537960" y="4462272"/>
+            <a:ext cx="2432304" cy="420624"/>
           </a:xfrm>
           <a:prstGeom prst="roundRect">
             <a:avLst>
-              <a:gd name="adj" fmla="val 6400"/>
+              <a:gd name="adj" fmla="val 15217"/>
             </a:avLst>
           </a:prstGeom>
           <a:solidFill>
@@ -7737,13 +7915,191 @@
       </p:sp>
       <p:sp>
         <p:nvSpPr>
-          <p:cNvPr id="21" name="Text 19"/>
-          <p:cNvSpPr/>
-          <p:nvPr/>
-        </p:nvSpPr>
-        <p:spPr>
-          <a:xfrm>
-            <a:off x="868680" y="5303520"/>
+          <p:cNvPr id="25" name="Text 23"/>
+          <p:cNvSpPr/>
+          <p:nvPr/>
+        </p:nvSpPr>
+        <p:spPr>
+          <a:xfrm>
+            <a:off x="6647688" y="4462272"/>
+            <a:ext cx="2212848" cy="420624"/>
+          </a:xfrm>
+          <a:prstGeom prst="rect">
+            <a:avLst/>
+          </a:prstGeom>
+          <a:noFill/>
+          <a:ln/>
+        </p:spPr>
+        <p:txBody>
+          <a:bodyPr wrap="square" lIns="0" tIns="0" rIns="0" bIns="0" rtlCol="0" anchor="ctr"/>
+          <a:lstStyle/>
+          <a:p>
+            <a:pPr indent="0" marL="0">
+              <a:buNone/>
+            </a:pPr>
+            <a:r>
+              <a:rPr lang="en-US" sz="1000" b="1" u="sng" dirty="0">
+                <a:solidFill>
+                  <a:srgbClr val="FFB300"/>
+                </a:solidFill>
+                <a:latin typeface="Calibri" pitchFamily="34" charset="0"/>
+                <a:ea typeface="Calibri" pitchFamily="34" charset="-122"/>
+                <a:cs typeface="Calibri" pitchFamily="34" charset="-120"/>
+                <a:hlinkClick r:id="rId5" invalidUrl="" action="" tgtFrame="" tooltip="" history="1" highlightClick="0" endSnd="0">
+                  <a:extLst>
+                    <a:ext uri="{A12FA001-AC4F-418D-AE19-62706E023703}">
+                      <ahyp:hlinkClr xmlns:ahyp="http://schemas.microsoft.com/office/drawing/2018/hyperlinkcolor" val="tx"/>
+                    </a:ext>
+                  </a:extLst>
+                </a:hlinkClick>
+              </a:rPr>
+              <a:t>GitHub  </a:t>
+            </a:r>
+            <a:pPr indent="0" marL="0">
+              <a:buNone/>
+            </a:pPr>
+            <a:r>
+              <a:rPr lang="en-US" sz="1000" u="sng" dirty="0">
+                <a:solidFill>
+                  <a:srgbClr val="FFFFFF"/>
+                </a:solidFill>
+                <a:latin typeface="Calibri" pitchFamily="34" charset="0"/>
+                <a:ea typeface="Calibri" pitchFamily="34" charset="-122"/>
+                <a:cs typeface="Calibri" pitchFamily="34" charset="-120"/>
+                <a:hlinkClick r:id="rId6" invalidUrl="" action="" tgtFrame="" tooltip="" history="1" highlightClick="0" endSnd="0">
+                  <a:extLst>
+                    <a:ext uri="{A12FA001-AC4F-418D-AE19-62706E023703}">
+                      <ahyp:hlinkClr xmlns:ahyp="http://schemas.microsoft.com/office/drawing/2018/hyperlinkcolor" val="tx"/>
+                    </a:ext>
+                  </a:extLst>
+                </a:hlinkClick>
+              </a:rPr>
+              <a:t>/Nirisha22</a:t>
+            </a:r>
+            <a:endParaRPr lang="en-US" sz="1000" dirty="0"/>
+          </a:p>
+        </p:txBody>
+      </p:sp>
+      <p:sp>
+        <p:nvSpPr>
+          <p:cNvPr id="26" name="Shape 24"/>
+          <p:cNvSpPr/>
+          <p:nvPr/>
+        </p:nvSpPr>
+        <p:spPr>
+          <a:xfrm>
+            <a:off x="9116568" y="4462272"/>
+            <a:ext cx="2432304" cy="420624"/>
+          </a:xfrm>
+          <a:prstGeom prst="roundRect">
+            <a:avLst>
+              <a:gd name="adj" fmla="val 15217"/>
+            </a:avLst>
+          </a:prstGeom>
+          <a:solidFill>
+            <a:srgbClr val="1B3155"/>
+          </a:solidFill>
+          <a:ln/>
+        </p:spPr>
+      </p:sp>
+      <p:sp>
+        <p:nvSpPr>
+          <p:cNvPr id="27" name="Text 25"/>
+          <p:cNvSpPr/>
+          <p:nvPr/>
+        </p:nvSpPr>
+        <p:spPr>
+          <a:xfrm>
+            <a:off x="9226296" y="4462272"/>
+            <a:ext cx="2212848" cy="420624"/>
+          </a:xfrm>
+          <a:prstGeom prst="rect">
+            <a:avLst/>
+          </a:prstGeom>
+          <a:noFill/>
+          <a:ln/>
+        </p:spPr>
+        <p:txBody>
+          <a:bodyPr wrap="square" lIns="0" tIns="0" rIns="0" bIns="0" rtlCol="0" anchor="ctr"/>
+          <a:lstStyle/>
+          <a:p>
+            <a:pPr indent="0" marL="0">
+              <a:buNone/>
+            </a:pPr>
+            <a:r>
+              <a:rPr lang="en-US" sz="1000" b="1" u="sng" dirty="0">
+                <a:solidFill>
+                  <a:srgbClr val="FFB300"/>
+                </a:solidFill>
+                <a:latin typeface="Calibri" pitchFamily="34" charset="0"/>
+                <a:ea typeface="Calibri" pitchFamily="34" charset="-122"/>
+                <a:cs typeface="Calibri" pitchFamily="34" charset="-120"/>
+                <a:hlinkClick r:id="rId7" invalidUrl="" action="" tgtFrame="" tooltip="" history="1" highlightClick="0" endSnd="0">
+                  <a:extLst>
+                    <a:ext uri="{A12FA001-AC4F-418D-AE19-62706E023703}">
+                      <ahyp:hlinkClr xmlns:ahyp="http://schemas.microsoft.com/office/drawing/2018/hyperlinkcolor" val="tx"/>
+                    </a:ext>
+                  </a:extLst>
+                </a:hlinkClick>
+              </a:rPr>
+              <a:t>LinkedIn  </a:t>
+            </a:r>
+            <a:pPr indent="0" marL="0">
+              <a:buNone/>
+            </a:pPr>
+            <a:r>
+              <a:rPr lang="en-US" sz="1000" u="sng" dirty="0">
+                <a:solidFill>
+                  <a:srgbClr val="FFFFFF"/>
+                </a:solidFill>
+                <a:latin typeface="Calibri" pitchFamily="34" charset="0"/>
+                <a:ea typeface="Calibri" pitchFamily="34" charset="-122"/>
+                <a:cs typeface="Calibri" pitchFamily="34" charset="-120"/>
+                <a:hlinkClick r:id="rId8" invalidUrl="" action="" tgtFrame="" tooltip="" history="1" highlightClick="0" endSnd="0">
+                  <a:extLst>
+                    <a:ext uri="{A12FA001-AC4F-418D-AE19-62706E023703}">
+                      <ahyp:hlinkClr xmlns:ahyp="http://schemas.microsoft.com/office/drawing/2018/hyperlinkcolor" val="tx"/>
+                    </a:ext>
+                  </a:extLst>
+                </a:hlinkClick>
+              </a:rPr>
+              <a:t>/nirisha-chowdary</a:t>
+            </a:r>
+            <a:endParaRPr lang="en-US" sz="1000" dirty="0"/>
+          </a:p>
+        </p:txBody>
+      </p:sp>
+      <p:sp>
+        <p:nvSpPr>
+          <p:cNvPr id="28" name="Shape 26"/>
+          <p:cNvSpPr/>
+          <p:nvPr/>
+        </p:nvSpPr>
+        <p:spPr>
+          <a:xfrm>
+            <a:off x="548640" y="5230368"/>
+            <a:ext cx="11091672" cy="1033272"/>
+          </a:xfrm>
+          <a:prstGeom prst="roundRect">
+            <a:avLst>
+              <a:gd name="adj" fmla="val 7080"/>
+            </a:avLst>
+          </a:prstGeom>
+          <a:solidFill>
+            <a:srgbClr val="1B3155"/>
+          </a:solidFill>
+          <a:ln/>
+        </p:spPr>
+      </p:sp>
+      <p:sp>
+        <p:nvSpPr>
+          <p:cNvPr id="29" name="Text 27"/>
+          <p:cNvSpPr/>
+          <p:nvPr/>
+        </p:nvSpPr>
+        <p:spPr>
+          <a:xfrm>
+            <a:off x="868680" y="5358384"/>
             <a:ext cx="10424160" cy="274320"/>
           </a:xfrm>
           <a:prstGeom prst="rect">
@@ -7776,14 +8132,14 @@
       </p:sp>
       <p:sp>
         <p:nvSpPr>
-          <p:cNvPr id="22" name="Text 20"/>
-          <p:cNvSpPr/>
-          <p:nvPr/>
-        </p:nvSpPr>
-        <p:spPr>
-          <a:xfrm>
-            <a:off x="868680" y="5623560"/>
-            <a:ext cx="10424160" cy="548640"/>
+          <p:cNvPr id="30" name="Text 28"/>
+          <p:cNvSpPr/>
+          <p:nvPr/>
+        </p:nvSpPr>
+        <p:spPr>
+          <a:xfrm>
+            <a:off x="868680" y="5650992"/>
+            <a:ext cx="10424160" cy="502920"/>
           </a:xfrm>
           <a:prstGeom prst="rect">
             <a:avLst/>
@@ -9647,8 +10003,8 @@
         </p:nvSpPr>
         <p:spPr>
           <a:xfrm>
-            <a:off x="1097280" y="5440680"/>
-            <a:ext cx="9994392" cy="594360"/>
+            <a:off x="1097280" y="5394960"/>
+            <a:ext cx="9994392" cy="548640"/>
           </a:xfrm>
           <a:prstGeom prst="rect">
             <a:avLst/>
@@ -9690,6 +10046,315 @@
               <a:t>saathwik.13@gmail.com  •  nirishapavuluri@gmail.com</a:t>
             </a:r>
             <a:endParaRPr lang="en-US" sz="1250" dirty="0"/>
+          </a:p>
+        </p:txBody>
+      </p:sp>
+      <p:sp>
+        <p:nvSpPr>
+          <p:cNvPr id="30" name="Text 28">
+            <a:hlinkClick r:id="rId1" tooltip=""/>
+          </p:cNvPr>
+          <p:cNvSpPr/>
+          <p:nvPr/>
+        </p:nvSpPr>
+        <p:spPr>
+          <a:xfrm>
+            <a:off x="1097280" y="5943600"/>
+            <a:ext cx="2148840" cy="292608"/>
+          </a:xfrm>
+          <a:prstGeom prst="rect">
+            <a:avLst/>
+          </a:prstGeom>
+          <a:noFill/>
+          <a:ln/>
+        </p:spPr>
+        <p:txBody>
+          <a:bodyPr wrap="square" lIns="0" tIns="0" rIns="0" bIns="0" rtlCol="0" anchor="ctr"/>
+          <a:lstStyle/>
+          <a:p>
+            <a:pPr algn="ctr" indent="0" marL="0">
+              <a:buNone/>
+            </a:pPr>
+            <a:r>
+              <a:rPr lang="en-US" sz="1000" u="sng" dirty="0">
+                <a:solidFill>
+                  <a:srgbClr val="A8C6E8"/>
+                </a:solidFill>
+                <a:latin typeface="Calibri" pitchFamily="34" charset="0"/>
+                <a:ea typeface="Calibri" pitchFamily="34" charset="-122"/>
+                <a:cs typeface="Calibri" pitchFamily="34" charset="-120"/>
+                <a:hlinkClick r:id="rId1" invalidUrl="" action="" tgtFrame="" tooltip="" history="1" highlightClick="0" endSnd="0">
+                  <a:extLst>
+                    <a:ext uri="{A12FA001-AC4F-418D-AE19-62706E023703}">
+                      <ahyp:hlinkClr xmlns:ahyp="http://schemas.microsoft.com/office/drawing/2018/hyperlinkcolor" val="tx"/>
+                    </a:ext>
+                  </a:extLst>
+                </a:hlinkClick>
+              </a:rPr>
+              <a:t>github.com/saatwik-1157</a:t>
+            </a:r>
+            <a:endParaRPr lang="en-US" sz="1000" dirty="0"/>
+          </a:p>
+        </p:txBody>
+      </p:sp>
+      <p:sp>
+        <p:nvSpPr>
+          <p:cNvPr id="31" name="Text 29"/>
+          <p:cNvSpPr/>
+          <p:nvPr/>
+        </p:nvSpPr>
+        <p:spPr>
+          <a:xfrm>
+            <a:off x="3246120" y="5943600"/>
+            <a:ext cx="128016" cy="292608"/>
+          </a:xfrm>
+          <a:prstGeom prst="rect">
+            <a:avLst/>
+          </a:prstGeom>
+          <a:noFill/>
+          <a:ln/>
+        </p:spPr>
+        <p:txBody>
+          <a:bodyPr wrap="square" lIns="0" tIns="0" rIns="0" bIns="0" rtlCol="0" anchor="ctr"/>
+          <a:lstStyle/>
+          <a:p>
+            <a:pPr algn="ctr" indent="0" marL="0">
+              <a:buNone/>
+            </a:pPr>
+            <a:r>
+              <a:rPr lang="en-US" sz="1000" dirty="0">
+                <a:solidFill>
+                  <a:srgbClr val="7E97B8"/>
+                </a:solidFill>
+                <a:latin typeface="Calibri" pitchFamily="34" charset="0"/>
+                <a:ea typeface="Calibri" pitchFamily="34" charset="-122"/>
+                <a:cs typeface="Calibri" pitchFamily="34" charset="-120"/>
+              </a:rPr>
+              <a:t>·</a:t>
+            </a:r>
+            <a:endParaRPr lang="en-US" sz="1000" dirty="0"/>
+          </a:p>
+        </p:txBody>
+      </p:sp>
+      <p:sp>
+        <p:nvSpPr>
+          <p:cNvPr id="32" name="Text 30">
+            <a:hlinkClick r:id="rId2" tooltip=""/>
+          </p:cNvPr>
+          <p:cNvSpPr/>
+          <p:nvPr/>
+        </p:nvSpPr>
+        <p:spPr>
+          <a:xfrm>
+            <a:off x="3374136" y="5943600"/>
+            <a:ext cx="3291840" cy="292608"/>
+          </a:xfrm>
+          <a:prstGeom prst="rect">
+            <a:avLst/>
+          </a:prstGeom>
+          <a:noFill/>
+          <a:ln/>
+        </p:spPr>
+        <p:txBody>
+          <a:bodyPr wrap="square" lIns="0" tIns="0" rIns="0" bIns="0" rtlCol="0" anchor="ctr"/>
+          <a:lstStyle/>
+          <a:p>
+            <a:pPr algn="ctr" indent="0" marL="0">
+              <a:buNone/>
+            </a:pPr>
+            <a:r>
+              <a:rPr lang="en-US" sz="1000" u="sng" dirty="0">
+                <a:solidFill>
+                  <a:srgbClr val="A8C6E8"/>
+                </a:solidFill>
+                <a:latin typeface="Calibri" pitchFamily="34" charset="0"/>
+                <a:ea typeface="Calibri" pitchFamily="34" charset="-122"/>
+                <a:cs typeface="Calibri" pitchFamily="34" charset="-120"/>
+                <a:hlinkClick r:id="rId2" invalidUrl="" action="" tgtFrame="" tooltip="" history="1" highlightClick="0" endSnd="0">
+                  <a:extLst>
+                    <a:ext uri="{A12FA001-AC4F-418D-AE19-62706E023703}">
+                      <ahyp:hlinkClr xmlns:ahyp="http://schemas.microsoft.com/office/drawing/2018/hyperlinkcolor" val="tx"/>
+                    </a:ext>
+                  </a:extLst>
+                </a:hlinkClick>
+              </a:rPr>
+              <a:t>linkedin.com/in/saatwiksairaamvasamsetti</a:t>
+            </a:r>
+            <a:endParaRPr lang="en-US" sz="1000" dirty="0"/>
+          </a:p>
+        </p:txBody>
+      </p:sp>
+      <p:sp>
+        <p:nvSpPr>
+          <p:cNvPr id="33" name="Text 31"/>
+          <p:cNvSpPr/>
+          <p:nvPr/>
+        </p:nvSpPr>
+        <p:spPr>
+          <a:xfrm>
+            <a:off x="6665976" y="5943600"/>
+            <a:ext cx="128016" cy="292608"/>
+          </a:xfrm>
+          <a:prstGeom prst="rect">
+            <a:avLst/>
+          </a:prstGeom>
+          <a:noFill/>
+          <a:ln/>
+        </p:spPr>
+        <p:txBody>
+          <a:bodyPr wrap="square" lIns="0" tIns="0" rIns="0" bIns="0" rtlCol="0" anchor="ctr"/>
+          <a:lstStyle/>
+          <a:p>
+            <a:pPr algn="ctr" indent="0" marL="0">
+              <a:buNone/>
+            </a:pPr>
+            <a:r>
+              <a:rPr lang="en-US" sz="1000" dirty="0">
+                <a:solidFill>
+                  <a:srgbClr val="7E97B8"/>
+                </a:solidFill>
+                <a:latin typeface="Calibri" pitchFamily="34" charset="0"/>
+                <a:ea typeface="Calibri" pitchFamily="34" charset="-122"/>
+                <a:cs typeface="Calibri" pitchFamily="34" charset="-120"/>
+              </a:rPr>
+              <a:t>·</a:t>
+            </a:r>
+            <a:endParaRPr lang="en-US" sz="1000" dirty="0"/>
+          </a:p>
+        </p:txBody>
+      </p:sp>
+      <p:sp>
+        <p:nvSpPr>
+          <p:cNvPr id="34" name="Text 32">
+            <a:hlinkClick r:id="rId3" tooltip=""/>
+          </p:cNvPr>
+          <p:cNvSpPr/>
+          <p:nvPr/>
+        </p:nvSpPr>
+        <p:spPr>
+          <a:xfrm>
+            <a:off x="6793992" y="5943600"/>
+            <a:ext cx="1828800" cy="292608"/>
+          </a:xfrm>
+          <a:prstGeom prst="rect">
+            <a:avLst/>
+          </a:prstGeom>
+          <a:noFill/>
+          <a:ln/>
+        </p:spPr>
+        <p:txBody>
+          <a:bodyPr wrap="square" lIns="0" tIns="0" rIns="0" bIns="0" rtlCol="0" anchor="ctr"/>
+          <a:lstStyle/>
+          <a:p>
+            <a:pPr algn="ctr" indent="0" marL="0">
+              <a:buNone/>
+            </a:pPr>
+            <a:r>
+              <a:rPr lang="en-US" sz="1000" u="sng" dirty="0">
+                <a:solidFill>
+                  <a:srgbClr val="A8C6E8"/>
+                </a:solidFill>
+                <a:latin typeface="Calibri" pitchFamily="34" charset="0"/>
+                <a:ea typeface="Calibri" pitchFamily="34" charset="-122"/>
+                <a:cs typeface="Calibri" pitchFamily="34" charset="-120"/>
+                <a:hlinkClick r:id="rId3" invalidUrl="" action="" tgtFrame="" tooltip="" history="1" highlightClick="0" endSnd="0">
+                  <a:extLst>
+                    <a:ext uri="{A12FA001-AC4F-418D-AE19-62706E023703}">
+                      <ahyp:hlinkClr xmlns:ahyp="http://schemas.microsoft.com/office/drawing/2018/hyperlinkcolor" val="tx"/>
+                    </a:ext>
+                  </a:extLst>
+                </a:hlinkClick>
+              </a:rPr>
+              <a:t>github.com/Nirisha22</a:t>
+            </a:r>
+            <a:endParaRPr lang="en-US" sz="1000" dirty="0"/>
+          </a:p>
+        </p:txBody>
+      </p:sp>
+      <p:sp>
+        <p:nvSpPr>
+          <p:cNvPr id="35" name="Text 33"/>
+          <p:cNvSpPr/>
+          <p:nvPr/>
+        </p:nvSpPr>
+        <p:spPr>
+          <a:xfrm>
+            <a:off x="8622792" y="5943600"/>
+            <a:ext cx="128016" cy="292608"/>
+          </a:xfrm>
+          <a:prstGeom prst="rect">
+            <a:avLst/>
+          </a:prstGeom>
+          <a:noFill/>
+          <a:ln/>
+        </p:spPr>
+        <p:txBody>
+          <a:bodyPr wrap="square" lIns="0" tIns="0" rIns="0" bIns="0" rtlCol="0" anchor="ctr"/>
+          <a:lstStyle/>
+          <a:p>
+            <a:pPr algn="ctr" indent="0" marL="0">
+              <a:buNone/>
+            </a:pPr>
+            <a:r>
+              <a:rPr lang="en-US" sz="1000" dirty="0">
+                <a:solidFill>
+                  <a:srgbClr val="7E97B8"/>
+                </a:solidFill>
+                <a:latin typeface="Calibri" pitchFamily="34" charset="0"/>
+                <a:ea typeface="Calibri" pitchFamily="34" charset="-122"/>
+                <a:cs typeface="Calibri" pitchFamily="34" charset="-120"/>
+              </a:rPr>
+              <a:t>·</a:t>
+            </a:r>
+            <a:endParaRPr lang="en-US" sz="1000" dirty="0"/>
+          </a:p>
+        </p:txBody>
+      </p:sp>
+      <p:sp>
+        <p:nvSpPr>
+          <p:cNvPr id="36" name="Text 34">
+            <a:hlinkClick r:id="rId4" tooltip=""/>
+          </p:cNvPr>
+          <p:cNvSpPr/>
+          <p:nvPr/>
+        </p:nvSpPr>
+        <p:spPr>
+          <a:xfrm>
+            <a:off x="8750808" y="5943600"/>
+            <a:ext cx="2724912" cy="292608"/>
+          </a:xfrm>
+          <a:prstGeom prst="rect">
+            <a:avLst/>
+          </a:prstGeom>
+          <a:noFill/>
+          <a:ln/>
+        </p:spPr>
+        <p:txBody>
+          <a:bodyPr wrap="square" lIns="0" tIns="0" rIns="0" bIns="0" rtlCol="0" anchor="ctr"/>
+          <a:lstStyle/>
+          <a:p>
+            <a:pPr algn="ctr" indent="0" marL="0">
+              <a:buNone/>
+            </a:pPr>
+            <a:r>
+              <a:rPr lang="en-US" sz="1000" u="sng" dirty="0">
+                <a:solidFill>
+                  <a:srgbClr val="A8C6E8"/>
+                </a:solidFill>
+                <a:latin typeface="Calibri" pitchFamily="34" charset="0"/>
+                <a:ea typeface="Calibri" pitchFamily="34" charset="-122"/>
+                <a:cs typeface="Calibri" pitchFamily="34" charset="-120"/>
+                <a:hlinkClick r:id="rId4" invalidUrl="" action="" tgtFrame="" tooltip="" history="1" highlightClick="0" endSnd="0">
+                  <a:extLst>
+                    <a:ext uri="{A12FA001-AC4F-418D-AE19-62706E023703}">
+                      <ahyp:hlinkClr xmlns:ahyp="http://schemas.microsoft.com/office/drawing/2018/hyperlinkcolor" val="tx"/>
+                    </a:ext>
+                  </a:extLst>
+                </a:hlinkClick>
+              </a:rPr>
+              <a:t>linkedin.com/in/nirisha-chowdary</a:t>
+            </a:r>
+            <a:endParaRPr lang="en-US" sz="1000" dirty="0"/>
           </a:p>
         </p:txBody>
       </p:sp>

--- a/sentinelai/SentinelAI_Execution_Plan.pptx
+++ b/sentinelai/SentinelAI_Execution_Plan.pptx
@@ -964,7 +964,7 @@
           <a:p>
             <a:r>
               <a:rPr lang="en-US" dirty="0"/>
-              <a:t>Primary customer is government (Smart City SPVs, NHAI, municipal bodies) — capital purchase plus recurring SaaS and AMC. The recurring layers (dashboard, AMC, analytics, API) are the long-term margin engine.</a:t>
+              <a:t>Primary customer is government (Smart City SPVs, NHAI, municipal bodies) — capital purchase plus recurring SaaS and AMC. The recurring layers (dashboard, AMC, analytics, API) are the long-term margin engine. Note if asked: the Smart Cities Mission selected 100 cities and its central funding window has closed; the SPVs and the municipal bodies that inherited those assets remain the buyers. No customer conversations have happened yet — that is Phase 1.</a:t>
             </a:r>
             <a:endParaRPr lang="en-US" dirty="0"/>
           </a:p>
@@ -1052,7 +1052,7 @@
           <a:p>
             <a:r>
               <a:rPr lang="en-US" dirty="0"/>
-              <a:t>The simulation proves the system logic end-to-end in software before hardware spend: detection, multi-sensor verification, Safe Corridor mesh coordination, dispatch, and the predictive risk layer. A recorded ~70-second capture ships in the package (demo/SentinelAI_Demo.mp4) — upload it (YouTube unlisted / Drive) and paste the link into the placeholder box. The live version runs in any browser if you want to demo it interactively.</a:t>
+              <a:t>Be precise about what this is: a scripted walkthrough of the intended incident flow — the sensor values and the 3/3 gate are synthetic, driven by a timeline, not by a trained model. It demonstrates the interface, the mesh coordination and the dispatch sequence before any hardware spend; it does NOT demonstrate detection accuracy. A recorded ~64-second capture ships in the package (demo/SentinelAI_Demo.mp4) — upload it (YouTube unlisted / Drive) and paste the link into the placeholder box. Real detection models are the Phase 2 deliverable.</a:t>
             </a:r>
             <a:endParaRPr lang="en-US" dirty="0"/>
           </a:p>
@@ -1140,7 +1140,7 @@
           <a:p>
             <a:r>
               <a:rPr lang="en-US" dirty="0"/>
-              <a:t>Two co-founders, both Integrated M.Tech CSE at VIT-AP University (batch 2024-29), with complementary ownership: Saatwik on engineering (edge AI, dashboard), Nirisha on research and strategy (validation, business model, IP). Advisor slots are outreach targets for Phase 1.</a:t>
+              <a:t>Nirisha is the founder — she originated the concept and owns product vision, validation, business model and IP. Saatwik is co-founder and tech lead, owning the technical architecture and build. Both are Integrated M.Tech CSE at VIT-AP University, batch 2024-29. Advisor slots are outreach targets for Phase 1.</a:t>
             </a:r>
             <a:endParaRPr lang="en-US" dirty="0"/>
           </a:p>
@@ -1404,7 +1404,7 @@
           <a:p>
             <a:r>
               <a:rPr lang="en-US" dirty="0"/>
-              <a:t>India records over 1.68 lakh road accident deaths a year (MoRTH 2022). A large share are preventable with faster response — the golden hour. Women's safety in isolated public spaces is a parallel crisis. Existing tools are passive or depend on the victim to act.</a:t>
+              <a:t>India recorded 1,68,491 road accident deaths in 2022 (MoRTH). The Law Commission's Report 201 estimated half of road fatalities could be saved with timely care in the golden hour. Women's safety in isolated public spaces is a parallel crisis. Existing tools are passive or depend on the victim to act.</a:t>
             </a:r>
             <a:endParaRPr lang="en-US" dirty="0"/>
           </a:p>
@@ -1844,7 +1844,7 @@
           <a:p>
             <a:r>
               <a:rPr lang="en-US" dirty="0"/>
-              <a:t>Unlike CCTV (records) and SOS apps (need a conscious user), SentinelAI detects, understands, verifies and responds. Four candidate patent areas identified; a formal prior-art search is a Phase 1 deliverable.</a:t>
+              <a:t>Unlike CCTV (records) and SOS apps (need a conscious user), SentinelAI is designed to detect, understand, verify and respond. Be clear if asked: the SentinelAI column is the target design, not shipped capability, and the four IP areas are candidates — no prior-art search has been done yet.</a:t>
             </a:r>
             <a:endParaRPr lang="en-US" dirty="0"/>
           </a:p>
@@ -3020,7 +3020,7 @@
                 <a:ea typeface="Calibri" pitchFamily="34" charset="-122"/>
                 <a:cs typeface="Calibri" pitchFamily="34" charset="-120"/>
               </a:rPr>
-              <a:t>Saatwik Sairaam Vasamsetti  •  Sai Nirisha Chowdary Pavuluri
+              <a:t>Sai Nirisha Chowdary Pavuluri  •  Saatwik Sairaam Vasamsetti
 </a:t>
             </a:r>
             <a:pPr algn="ctr" indent="0" marL="0">
@@ -4744,7 +4744,7 @@
                 <a:ea typeface="Calibri" pitchFamily="34" charset="-122"/>
                 <a:cs typeface="Calibri" pitchFamily="34" charset="-120"/>
               </a:rPr>
-              <a:t>Built for India's 100+ Smart Cities</a:t>
+              <a:t>Built for India's municipal safety infrastructure</a:t>
             </a:r>
             <a:endParaRPr lang="en-US" sz="3400" dirty="0"/>
           </a:p>
@@ -5026,7 +5026,7 @@
                 <a:ea typeface="Calibri" pitchFamily="34" charset="-122"/>
                 <a:cs typeface="Calibri" pitchFamily="34" charset="-120"/>
               </a:rPr>
-              <a:t>100+ cities under the Smart Cities Mission</a:t>
+              <a:t>100 cities were selected under the Smart Cities Mission</a:t>
             </a:r>
             <a:endParaRPr lang="en-US" sz="1250" dirty="0"/>
           </a:p>
@@ -6271,7 +6271,7 @@
                 <a:ea typeface="Calibri" pitchFamily="34" charset="-122"/>
                 <a:cs typeface="Calibri" pitchFamily="34" charset="-120"/>
               </a:rPr>
-              <a:t>We built a working software simulation of a SentinelAI deployment — a live 3D city block of smart nodes that detects a simulated crash and SOS event, runs multi-sensor verification, activates the Safe Corridor, and dispatches alerts in real time.</a:t>
+              <a:t>We built an interactive software simulation of a SentinelAI deployment — a live 3D city block of smart nodes that walks through the full incident flow: a scripted crash and SOS event, the multi-sensor validation gate, Safe Corridor activation and dispatch, end to end.</a:t>
             </a:r>
             <a:endParaRPr lang="en-US" sz="1450" dirty="0"/>
           </a:p>
@@ -6432,7 +6432,7 @@
                 <a:ea typeface="Calibri" pitchFamily="34" charset="-122"/>
                 <a:cs typeface="Calibri" pitchFamily="34" charset="-120"/>
               </a:rPr>
-              <a:t>Incident detection</a:t>
+              <a:t>Incident walkthrough</a:t>
             </a:r>
             <a:endParaRPr lang="en-US" sz="1300" dirty="0"/>
           </a:p>
@@ -6471,7 +6471,7 @@
                 <a:ea typeface="Calibri" pitchFamily="34" charset="-122"/>
                 <a:cs typeface="Calibri" pitchFamily="34" charset="-120"/>
               </a:rPr>
-              <a:t>crash + distress events trigger the on-node AI, IR camera and validation gate</a:t>
+              <a:t>crash + distress events step through the validation gate and IR camera view</a:t>
             </a:r>
             <a:endParaRPr lang="en-US" sz="1050" dirty="0"/>
           </a:p>
@@ -6971,7 +6971,7 @@
         </p:nvSpPr>
         <p:spPr>
           <a:xfrm>
-            <a:off x="548640" y="5989320"/>
+            <a:off x="548640" y="5943600"/>
             <a:ext cx="6675120" cy="320040"/>
           </a:xfrm>
           <a:prstGeom prst="rect">
@@ -6996,9 +6996,48 @@
                 <a:ea typeface="Calibri" pitchFamily="34" charset="-122"/>
                 <a:cs typeface="Calibri" pitchFamily="34" charset="-120"/>
               </a:rPr>
-              <a:t>Demo: sentinelai/demo/index.html (live, any browser) · SentinelAI_Demo.mp4 (recorded) — no install needed.</a:t>
+              <a:t>Scripted simulation — synthetic sensor values, no trained model or hardware yet. It demonstrates the intended flow and interface, not detection accuracy.</a:t>
             </a:r>
             <a:endParaRPr lang="en-US" sz="1050" dirty="0"/>
+          </a:p>
+        </p:txBody>
+      </p:sp>
+      <p:sp>
+        <p:nvSpPr>
+          <p:cNvPr id="31" name="Text 29"/>
+          <p:cNvSpPr/>
+          <p:nvPr/>
+        </p:nvSpPr>
+        <p:spPr>
+          <a:xfrm>
+            <a:off x="548640" y="6236208"/>
+            <a:ext cx="6675120" cy="292608"/>
+          </a:xfrm>
+          <a:prstGeom prst="rect">
+            <a:avLst/>
+          </a:prstGeom>
+          <a:noFill/>
+          <a:ln/>
+        </p:spPr>
+        <p:txBody>
+          <a:bodyPr wrap="square" lIns="0" tIns="0" rIns="0" bIns="0" rtlCol="0" anchor="ctr"/>
+          <a:lstStyle/>
+          <a:p>
+            <a:pPr indent="0" marL="0">
+              <a:buNone/>
+            </a:pPr>
+            <a:r>
+              <a:rPr lang="en-US" sz="1000" i="1" dirty="0">
+                <a:solidFill>
+                  <a:srgbClr val="7E97B8"/>
+                </a:solidFill>
+                <a:latin typeface="Calibri" pitchFamily="34" charset="0"/>
+                <a:ea typeface="Calibri" pitchFamily="34" charset="-122"/>
+                <a:cs typeface="Calibri" pitchFamily="34" charset="-120"/>
+              </a:rPr>
+              <a:t>sentinelai/demo/index.html (live, any browser) · SentinelAI_Demo.mp4 (recorded)</a:t>
+            </a:r>
+            <a:endParaRPr lang="en-US" sz="1000" dirty="0"/>
           </a:p>
         </p:txBody>
       </p:sp>
@@ -7334,7 +7373,7 @@
                 <a:ea typeface="Calibri" pitchFamily="34" charset="-122"/>
                 <a:cs typeface="Calibri" pitchFamily="34" charset="-120"/>
               </a:rPr>
-              <a:t>Saatwik Sairaam Vasamsetti</a:t>
+              <a:t>Sai Nirisha Chowdary Pavuluri</a:t>
             </a:r>
             <a:endParaRPr lang="en-US" sz="1650" dirty="0"/>
           </a:p>
@@ -7373,7 +7412,7 @@
                 <a:ea typeface="Calibri" pitchFamily="34" charset="-122"/>
                 <a:cs typeface="Calibri" pitchFamily="34" charset="-120"/>
               </a:rPr>
-              <a:t>Co-Founder — Product &amp; Engineering</a:t>
+              <a:t>Founder</a:t>
             </a:r>
             <a:endParaRPr lang="en-US" sz="1200" dirty="0"/>
           </a:p>
@@ -7437,7 +7476,7 @@
                 <a:ea typeface="Calibri" pitchFamily="34" charset="-122"/>
                 <a:cs typeface="Calibri" pitchFamily="34" charset="-120"/>
               </a:rPr>
-              <a:t>Full-stack developer — shipped PathAhead (career-guidance platform), an ML stock-prediction system, and multiple production web platforms</a:t>
+              <a:t>Concept originator — authored the SentinelAI vision, market analysis and IP strategy; built a GPT implementation from scratch in pure Python</a:t>
             </a:r>
             <a:endParaRPr lang="en-US" sz="1100" dirty="0"/>
           </a:p>
@@ -7458,7 +7497,7 @@
                 <a:ea typeface="Calibri" pitchFamily="34" charset="-122"/>
                 <a:cs typeface="Calibri" pitchFamily="34" charset="-120"/>
               </a:rPr>
-              <a:t>Owns: edge AI models, sensor fusion, dashboard build</a:t>
+              <a:t>Owns: product vision, stakeholder validation, business model, partnerships</a:t>
             </a:r>
             <a:endParaRPr lang="en-US" sz="1100" dirty="0"/>
           </a:p>
@@ -7547,7 +7586,7 @@
                   </a:extLst>
                 </a:hlinkClick>
               </a:rPr>
-              <a:t>/saatwik-1157</a:t>
+              <a:t>/Nirisha22</a:t>
             </a:r>
             <a:endParaRPr lang="en-US" sz="1000" dirty="0"/>
           </a:p>
@@ -7636,7 +7675,7 @@
                   </a:extLst>
                 </a:hlinkClick>
               </a:rPr>
-              <a:t>/saatwiksairaamvasamsetti</a:t>
+              <a:t>/nirisha-chowdary</a:t>
             </a:r>
             <a:endParaRPr lang="en-US" sz="1000" dirty="0"/>
           </a:p>
@@ -7761,7 +7800,7 @@
                 <a:ea typeface="Calibri" pitchFamily="34" charset="-122"/>
                 <a:cs typeface="Calibri" pitchFamily="34" charset="-120"/>
               </a:rPr>
-              <a:t>Sai Nirisha Chowdary Pavuluri</a:t>
+              <a:t>Saatwik Sairaam Vasamsetti</a:t>
             </a:r>
             <a:endParaRPr lang="en-US" sz="1650" dirty="0"/>
           </a:p>
@@ -7800,7 +7839,7 @@
                 <a:ea typeface="Calibri" pitchFamily="34" charset="-122"/>
                 <a:cs typeface="Calibri" pitchFamily="34" charset="-120"/>
               </a:rPr>
-              <a:t>Co-Founder — Research &amp; Strategy</a:t>
+              <a:t>Co-Founder &amp; Tech Lead</a:t>
             </a:r>
             <a:endParaRPr lang="en-US" sz="1200" dirty="0"/>
           </a:p>
@@ -7864,7 +7903,7 @@
                 <a:ea typeface="Calibri" pitchFamily="34" charset="-122"/>
                 <a:cs typeface="Calibri" pitchFamily="34" charset="-120"/>
               </a:rPr>
-              <a:t>Concept originator — authored the SentinelAI vision, market analysis and IP strategy; built a GPT implementation from scratch in pure Python</a:t>
+              <a:t>Full-stack developer — shipped PathAhead (career-guidance platform), an ML stock-prediction system, and multiple production web platforms</a:t>
             </a:r>
             <a:endParaRPr lang="en-US" sz="1100" dirty="0"/>
           </a:p>
@@ -7885,7 +7924,7 @@
                 <a:ea typeface="Calibri" pitchFamily="34" charset="-122"/>
                 <a:cs typeface="Calibri" pitchFamily="34" charset="-120"/>
               </a:rPr>
-              <a:t>Owns: stakeholder validation, business model, partnerships</a:t>
+              <a:t>Owns: technical architecture, edge AI models, sensor fusion, dashboard build</a:t>
             </a:r>
             <a:endParaRPr lang="en-US" sz="1100" dirty="0"/>
           </a:p>
@@ -7974,7 +8013,7 @@
                   </a:extLst>
                 </a:hlinkClick>
               </a:rPr>
-              <a:t>/Nirisha22</a:t>
+              <a:t>/saatwik-1157</a:t>
             </a:r>
             <a:endParaRPr lang="en-US" sz="1000" dirty="0"/>
           </a:p>
@@ -8063,7 +8102,7 @@
                   </a:extLst>
                 </a:hlinkClick>
               </a:rPr>
-              <a:t>/nirisha-chowdary</a:t>
+              <a:t>/saatwiksairaamvasamsetti</a:t>
             </a:r>
             <a:endParaRPr lang="en-US" sz="1000" dirty="0"/>
           </a:p>
@@ -10626,7 +10665,7 @@
                 <a:ea typeface="Calibri" pitchFamily="34" charset="-122"/>
                 <a:cs typeface="Calibri" pitchFamily="34" charset="-120"/>
               </a:rPr>
-              <a:t>1.7 L+</a:t>
+              <a:t>1.68 L</a:t>
             </a:r>
             <a:endParaRPr lang="en-US" sz="5400" dirty="0"/>
           </a:p>
@@ -10665,7 +10704,7 @@
                 <a:ea typeface="Calibri" pitchFamily="34" charset="-122"/>
                 <a:cs typeface="Calibri" pitchFamily="34" charset="-120"/>
               </a:rPr>
-              <a:t>road-accident deaths in India every year — many die waiting for help that comes too late</a:t>
+              <a:t>road-accident deaths in India in 2022 — many die waiting for help that comes too late</a:t>
             </a:r>
             <a:endParaRPr lang="en-US" sz="1250" dirty="0"/>
           </a:p>
@@ -10704,7 +10743,7 @@
                 <a:ea typeface="Calibri" pitchFamily="34" charset="-122"/>
                 <a:cs typeface="Calibri" pitchFamily="34" charset="-120"/>
               </a:rPr>
-              <a:t>MoRTH Road Accidents in India 2022</a:t>
+              <a:t>MoRTH, Road Accidents in India 2022 (1,68,491)</a:t>
             </a:r>
             <a:endParaRPr lang="en-US" sz="900" dirty="0"/>
           </a:p>
@@ -10804,7 +10843,7 @@
                 <a:ea typeface="Calibri" pitchFamily="34" charset="-122"/>
                 <a:cs typeface="Calibri" pitchFamily="34" charset="-120"/>
               </a:rPr>
-              <a:t>of trauma deaths could be prevented if victims reached care within the golden hour</a:t>
+              <a:t>of road-accident fatalities could be saved with timely medical care in the golden hour</a:t>
             </a:r>
             <a:endParaRPr lang="en-US" sz="1250" dirty="0"/>
           </a:p>
@@ -10843,7 +10882,7 @@
                 <a:ea typeface="Calibri" pitchFamily="34" charset="-122"/>
                 <a:cs typeface="Calibri" pitchFamily="34" charset="-120"/>
               </a:rPr>
-              <a:t>Law Commission of India / trauma-care studies</a:t>
+              <a:t>Law Commission of India, Report 201 (2006)</a:t>
             </a:r>
             <a:endParaRPr lang="en-US" sz="900" dirty="0"/>
           </a:p>
@@ -18697,7 +18736,7 @@
                 <a:ea typeface="Calibri" pitchFamily="34" charset="-122"/>
                 <a:cs typeface="Calibri" pitchFamily="34" charset="-120"/>
               </a:rPr>
-              <a:t>PATENT-READY IP</a:t>
+              <a:t>CANDIDATE IP AREAS</a:t>
             </a:r>
             <a:endParaRPr lang="en-US" sz="1200" dirty="0"/>
           </a:p>
@@ -18842,7 +18881,7 @@
                 <a:ea typeface="Calibri" pitchFamily="34" charset="-122"/>
                 <a:cs typeface="Calibri" pitchFamily="34" charset="-120"/>
               </a:rPr>
-              <a:t>Subject to prior-art search — planned in Phase 1 with incubator IP-cell support.</a:t>
+              <a:t>Candidate areas only — no prior-art search has been run yet; that search is a Phase 1 deliverable. The SentinelAI column describes the designed system, not a built one.</a:t>
             </a:r>
             <a:endParaRPr lang="en-US" sz="1050" dirty="0"/>
           </a:p>
@@ -20961,6 +21000,45 @@
               <a:t>Campus pilot before any city spend</a:t>
             </a:r>
             <a:endParaRPr lang="en-US" sz="1150" dirty="0"/>
+          </a:p>
+        </p:txBody>
+      </p:sp>
+      <p:sp>
+        <p:nvSpPr>
+          <p:cNvPr id="16" name="Text 13"/>
+          <p:cNvSpPr/>
+          <p:nvPr/>
+        </p:nvSpPr>
+        <p:spPr>
+          <a:xfrm>
+            <a:off x="548640" y="6263640"/>
+            <a:ext cx="11091672" cy="365760"/>
+          </a:xfrm>
+          <a:prstGeom prst="rect">
+            <a:avLst/>
+          </a:prstGeom>
+          <a:noFill/>
+          <a:ln/>
+        </p:spPr>
+        <p:txBody>
+          <a:bodyPr wrap="square" lIns="0" tIns="0" rIns="0" bIns="0" rtlCol="0" anchor="ctr"/>
+          <a:lstStyle/>
+          <a:p>
+            <a:pPr indent="0" marL="0">
+              <a:buNone/>
+            </a:pPr>
+            <a:r>
+              <a:rPr lang="en-US" sz="1000" i="1" dirty="0">
+                <a:solidFill>
+                  <a:srgbClr val="7E97B8"/>
+                </a:solidFill>
+                <a:latin typeface="Calibri" pitchFamily="34" charset="0"/>
+                <a:ea typeface="Calibri" pitchFamily="34" charset="-122"/>
+                <a:cs typeface="Calibri" pitchFamily="34" charset="-120"/>
+              </a:rPr>
+              <a:t>Hardware lines (₹9.5 L) cover ~11 node-builds at the ₹82 k per-node BOM on the next slide — 5 deployed, plus a lab reference unit, two build iterations and spare cameras/processors.</a:t>
+            </a:r>
+            <a:endParaRPr lang="en-US" sz="1000" dirty="0"/>
           </a:p>
         </p:txBody>
       </p:sp>
